--- a/artifacts/speaking-portfolio-expanded/decks/failure-improvement-15min-screen.pptx
+++ b/artifacts/speaking-portfolio-expanded/decks/failure-improvement-15min-screen.pptx
@@ -330,53 +330,53 @@
                 <a:ea typeface="Arial"/>
                 <a:cs typeface="Arial"/>
               </a:rPr>
-              <a:t xml:space="preserve">This talk owns the offline improvement loop, including the people reviewing its output. The examples are teaching fixtures until I attach a production record. Runtime recovery belongs to Adaptive, agentic apps.</a:t>
-            </a:r>
-            <a:endParaRPr lang="en-US" sz="1200"/>
-          </a:p>
-          <a:p>
-            <a:pPr marL="0" indent="0">
-              <a:lnSpc>
-                <a:spcPts val="1560"/>
-              </a:lnSpc>
-              <a:spcAft>
-                <a:spcPts val="0"/>
-              </a:spcAft>
-              <a:buNone/>
-            </a:pPr>
-            <a:r>
-              <a:rPr lang="en-US" sz="1200" b="0">
-                <a:solidFill>
-                  <a:srgbClr val="202b33"/>
-                </a:solidFill>
-                <a:latin typeface="Arial"/>
-                <a:ea typeface="Arial"/>
-                <a:cs typeface="Arial"/>
-              </a:rPr>
-              <a:t xml:space="preserve"/>
-            </a:r>
-            <a:endParaRPr lang="en-US" sz="1200"/>
-          </a:p>
-          <a:p>
-            <a:pPr marL="0" indent="0">
-              <a:lnSpc>
-                <a:spcPts val="1560"/>
-              </a:lnSpc>
-              <a:spcAft>
-                <a:spcPts val="0"/>
-              </a:spcAft>
-              <a:buNone/>
-            </a:pPr>
-            <a:r>
-              <a:rPr lang="en-US" sz="1200" b="0">
-                <a:solidFill>
-                  <a:srgbClr val="202b33"/>
-                </a:solidFill>
-                <a:latin typeface="Arial"/>
-                <a:ea typeface="Arial"/>
-                <a:cs typeface="Arial"/>
-              </a:rPr>
-              <a:t xml:space="preserve">There is a name for training people to ignore the channel that is supposed to warn them. Alert fatigue. Cvach reviewed it in clinical monitoring. I am borrowing the mechanism, not claiming a hospital study measured your on-call rotation. If our new agent creates a ticket for every log line, we have automated the thing that made the logs unreadable.</a:t>
+              <a:t xml:space="preserve">This talk owns the offline improvement loop, including the people reviewing its output. The examples are teaching fixtures until I attach a production record. Runtime recovery, and how much authority a running agent earns for itself, belongs to Adaptive, agentic apps.</a:t>
+            </a:r>
+            <a:endParaRPr lang="en-US" sz="1200"/>
+          </a:p>
+          <a:p>
+            <a:pPr marL="0" indent="0">
+              <a:lnSpc>
+                <a:spcPts val="1560"/>
+              </a:lnSpc>
+              <a:spcAft>
+                <a:spcPts val="0"/>
+              </a:spcAft>
+              <a:buNone/>
+            </a:pPr>
+            <a:r>
+              <a:rPr lang="en-US" sz="1200" b="0">
+                <a:solidFill>
+                  <a:srgbClr val="202b33"/>
+                </a:solidFill>
+                <a:latin typeface="Arial"/>
+                <a:ea typeface="Arial"/>
+                <a:cs typeface="Arial"/>
+              </a:rPr>
+              <a:t xml:space="preserve"/>
+            </a:r>
+            <a:endParaRPr lang="en-US" sz="1200"/>
+          </a:p>
+          <a:p>
+            <a:pPr marL="0" indent="0">
+              <a:lnSpc>
+                <a:spcPts val="1560"/>
+              </a:lnSpc>
+              <a:spcAft>
+                <a:spcPts val="0"/>
+              </a:spcAft>
+              <a:buNone/>
+            </a:pPr>
+            <a:r>
+              <a:rPr lang="en-US" sz="1200" b="0">
+                <a:solidFill>
+                  <a:srgbClr val="202b33"/>
+                </a:solidFill>
+                <a:latin typeface="Arial"/>
+                <a:ea typeface="Arial"/>
+                <a:cs typeface="Arial"/>
+              </a:rPr>
+              <a:t xml:space="preserve">There is a name for training people to ignore the channel that is supposed to warn them. Alert fatigue. Cvach measured it on hospital monitors. Your pager is the same instrument. If our new agent creates a ticket for every log line, we have automated the thing that made the logs unreadable.</a:t>
             </a:r>
             <a:endParaRPr lang="en-US" sz="1200"/>
           </a:p>
@@ -1911,7 +1911,7 @@
                 <a:ea typeface="Arial"/>
                 <a:cs typeface="Arial"/>
               </a:rPr>
-              <a:t xml:space="preserve">Diane Vaughan called the organizational pattern normalization of deviance. Her Challenger analysis shows how repeated acceptance of anomalies made them ordinary. Our application is narrower: a repair loop needs evidence that the defect is gone, because successful workarounds are very persuasive evidence of the wrong thing.</a:t>
+              <a:t xml:space="preserve">Diane Vaughan called the organizational pattern normalization of deviance. Her Challenger analysis shows how repeated acceptance of anomalies made them ordinary. A repair loop needs evidence that the defect is gone. Successful workarounds are very persuasive evidence of the wrong thing.</a:t>
             </a:r>
             <a:endParaRPr lang="en-US" sz="1200"/>
           </a:p>
@@ -4203,7 +4203,7 @@
                 <a:ea typeface="Arial"/>
                 <a:cs typeface="Arial"/>
               </a:rPr>
-              <a:t xml:space="preserve">Replay the opening scroll beside the distilled artifact. End there.</a:t>
+              <a:t xml:space="preserve">Replay the opening scroll beside the distilled artifact. End there. Stop talking.</a:t>
             </a:r>
             <a:endParaRPr lang="en-US" sz="1200"/>
           </a:p>
@@ -4436,7 +4436,7 @@
                 <a:ea typeface="Arial"/>
                 <a:cs typeface="Arial"/>
               </a:rPr>
-              <a:t xml:space="preserve">Your logs are a roadmap nobody reads</a:t>
+              <a:t xml:space="preserve">Nobody reads the scroll</a:t>
             </a:r>
             <a:endParaRPr lang="en-US" sz="3900"/>
           </a:p>

--- a/artifacts/speaking-portfolio-expanded/decks/failure-improvement-15min-screen.pptx
+++ b/artifacts/speaking-portfolio-expanded/decks/failure-improvement-15min-screen.pptx
@@ -146,7 +146,7 @@
                 <a:ea typeface="Arial"/>
                 <a:cs typeface="Arial"/>
               </a:rPr>
-              <a:t xml:space="preserve">Source slide 1. 00:00 to 01:00</a:t>
+              <a:t xml:space="preserve">Source slide 1. 00:00 to 01:45</a:t>
             </a:r>
             <a:endParaRPr lang="en-US" sz="1200"/>
           </a:p>
@@ -673,7 +673,7 @@
                 <a:ea typeface="Arial"/>
                 <a:cs typeface="Arial"/>
               </a:rPr>
-              <a:t xml:space="preserve">Source slide 2. 01:00 to 02:00</a:t>
+              <a:t xml:space="preserve">Source slide 2. 01:45 to 03:15</a:t>
             </a:r>
             <a:endParaRPr lang="en-US" sz="1200"/>
           </a:p>
@@ -1154,7 +1154,7 @@
                 <a:ea typeface="Arial"/>
                 <a:cs typeface="Arial"/>
               </a:rPr>
-              <a:t xml:space="preserve">Source slide 4. 02:00 to 03:30</a:t>
+              <a:t xml:space="preserve">Source slide 4. 03:15 to 04:45</a:t>
             </a:r>
             <a:endParaRPr lang="en-US" sz="1200"/>
           </a:p>
@@ -1635,7 +1635,7 @@
                 <a:ea typeface="Arial"/>
                 <a:cs typeface="Arial"/>
               </a:rPr>
-              <a:t xml:space="preserve">Source slide 6. 03:30 to 05:30</a:t>
+              <a:t xml:space="preserve">Source slide 6. 04:45 to 06:15</a:t>
             </a:r>
             <a:endParaRPr lang="en-US" sz="1200"/>
           </a:p>
@@ -2208,7 +2208,7 @@
                 <a:ea typeface="Arial"/>
                 <a:cs typeface="Arial"/>
               </a:rPr>
-              <a:t xml:space="preserve">Source slide 8. 05:30 to 09:30</a:t>
+              <a:t xml:space="preserve">Source slide 8. 06:15 to 09:45</a:t>
             </a:r>
             <a:endParaRPr lang="en-US" sz="1200"/>
           </a:p>
@@ -2781,7 +2781,7 @@
                 <a:ea typeface="Arial"/>
                 <a:cs typeface="Arial"/>
               </a:rPr>
-              <a:t xml:space="preserve">Source slide 9. 09:30 to 11:30</a:t>
+              <a:t xml:space="preserve">Source slide 9. 09:45 to 12:00</a:t>
             </a:r>
             <a:endParaRPr lang="en-US" sz="1200"/>
           </a:p>
@@ -3354,7 +3354,7 @@
                 <a:ea typeface="Arial"/>
                 <a:cs typeface="Arial"/>
               </a:rPr>
-              <a:t xml:space="preserve">Source slide 13. 11:30 to 13:30</a:t>
+              <a:t xml:space="preserve">Source slide 13. 12:00 to 13:45</a:t>
             </a:r>
             <a:endParaRPr lang="en-US" sz="1200"/>
           </a:p>
@@ -3881,7 +3881,7 @@
                 <a:ea typeface="Arial"/>
                 <a:cs typeface="Arial"/>
               </a:rPr>
-              <a:t xml:space="preserve">Source slide 15. 13:30 to 15:00</a:t>
+              <a:t xml:space="preserve">Source slide 15. 13:45 to 15:00</a:t>
             </a:r>
             <a:endParaRPr lang="en-US" sz="1200"/>
           </a:p>
